--- a/evals/previews/vitamin-b6-kidney-prognosis/vitamin-b6-kidney-prognosis.pptx
+++ b/evals/previews/vitamin-b6-kidney-prognosis/vitamin-b6-kidney-prognosis.pptx
@@ -2,13 +2,13 @@
 <file path=ppt/presentation.xml><?xml version="1.0" encoding="utf-8"?>
 <p:presentation xmlns:p="http://schemas.openxmlformats.org/presentationml/2006/main">
   <p:sldMasterIdLst>
-    <p:sldMasterId xmlns:r="http://schemas.openxmlformats.org/officeDocument/2006/relationships" id="2147483648" r:id="Ra85a85aa88d0433f"/>
+    <p:sldMasterId xmlns:r="http://schemas.openxmlformats.org/officeDocument/2006/relationships" id="2147483648" r:id="R32dea6ff72a74027"/>
   </p:sldMasterIdLst>
   <p:notesMasterIdLst>
-    <p:notesMasterId xmlns:r="http://schemas.openxmlformats.org/officeDocument/2006/relationships" r:id="R6cf1874262a04c74"/>
+    <p:notesMasterId xmlns:r="http://schemas.openxmlformats.org/officeDocument/2006/relationships" r:id="R90f9d45a98734cfa"/>
   </p:notesMasterIdLst>
   <p:sldIdLst>
-    <p:sldId xmlns:r="http://schemas.openxmlformats.org/officeDocument/2006/relationships" id="256" r:id="R5dba95d234c34496"/>
+    <p:sldId xmlns:r="http://schemas.openxmlformats.org/officeDocument/2006/relationships" id="256" r:id="R77e5b632166a414e"/>
   </p:sldIdLst>
   <p:sldSz cx="42805350" cy="30279975"/>
   <p:notesSz cx="6858000" cy="9144000"/>
@@ -525,7 +525,7 @@
   </p:cSld>
   <p:clrMap bg1="lt1" tx1="dk1" bg2="lt2" tx2="dk2" accent1="accent1" accent2="accent2" accent3="accent3" accent4="accent4" accent5="accent5" accent6="accent6" hlink="hlink" folHlink="folHlink"/>
   <p:sldLayoutIdLst>
-    <p:sldLayoutId xmlns:r="http://schemas.openxmlformats.org/officeDocument/2006/relationships" id="2147483649" r:id="R43638baff1694549"/>
+    <p:sldLayoutId xmlns:r="http://schemas.openxmlformats.org/officeDocument/2006/relationships" id="2147483649" r:id="Rf4bed66f30004bb3"/>
   </p:sldLayoutIdLst>
   <p:txStyles>
     <p:titleStyle>
@@ -1076,7 +1076,7 @@
           <p:cNvPr id="92" name="header-band">
             <a:extLst xmlns:a="http://schemas.openxmlformats.org/drawingml/2006/main">
               <a:ext uri="{FF2B5EF4-FFF2-40B4-BE49-F238E27FC236}">
-                <a16:creationId xmlns:a16="http://schemas.microsoft.com/office/drawing/2014/main" id="{95CD55AD-134C-4AC0-BC61-A2403242C4B0}"/>
+                <a16:creationId xmlns:a16="http://schemas.microsoft.com/office/drawing/2014/main" id="{5EFCDD7C-9206-46BF-9484-3197C6FC8FD0}"/>
               </a:ext>
             </a:extLst>
           </p:cNvPr>
@@ -1109,7 +1109,7 @@
           <p:cNvPr id="2" name="top-accent">
             <a:extLst xmlns:a="http://schemas.openxmlformats.org/drawingml/2006/main">
               <a:ext uri="{FF2B5EF4-FFF2-40B4-BE49-F238E27FC236}">
-                <a16:creationId xmlns:a16="http://schemas.microsoft.com/office/drawing/2014/main" id="{A6215A6C-AEF2-49E0-BB4C-92E8D1F629DD}"/>
+                <a16:creationId xmlns:a16="http://schemas.microsoft.com/office/drawing/2014/main" id="{E0120A37-7491-44A9-BFB4-54DB5B92680B}"/>
               </a:ext>
             </a:extLst>
           </p:cNvPr>
@@ -1142,7 +1142,7 @@
           <p:cNvPr id="3" name="poster-title">
             <a:extLst xmlns:a="http://schemas.openxmlformats.org/drawingml/2006/main">
               <a:ext uri="{FF2B5EF4-FFF2-40B4-BE49-F238E27FC236}">
-                <a16:creationId xmlns:a16="http://schemas.microsoft.com/office/drawing/2014/main" id="{12EF15FD-B766-42AD-ACAD-8219D7A04C61}"/>
+                <a16:creationId xmlns:a16="http://schemas.microsoft.com/office/drawing/2014/main" id="{4D801C1A-C681-4EF0-A306-5FFEB8F2B3E1}"/>
               </a:ext>
             </a:extLst>
           </p:cNvPr>
@@ -1192,7 +1192,7 @@
           <p:cNvPr id="4" name="authors">
             <a:extLst xmlns:a="http://schemas.openxmlformats.org/drawingml/2006/main">
               <a:ext uri="{FF2B5EF4-FFF2-40B4-BE49-F238E27FC236}">
-                <a16:creationId xmlns:a16="http://schemas.microsoft.com/office/drawing/2014/main" id="{A6CC6D5B-FC44-4926-9918-5BF06CB63A17}"/>
+                <a16:creationId xmlns:a16="http://schemas.microsoft.com/office/drawing/2014/main" id="{C056D09D-B2DD-4465-A5E2-31F24DF6920D}"/>
               </a:ext>
             </a:extLst>
           </p:cNvPr>
@@ -1242,7 +1242,7 @@
           <p:cNvPr id="5" name="affiliations">
             <a:extLst xmlns:a="http://schemas.openxmlformats.org/drawingml/2006/main">
               <a:ext uri="{FF2B5EF4-FFF2-40B4-BE49-F238E27FC236}">
-                <a16:creationId xmlns:a16="http://schemas.microsoft.com/office/drawing/2014/main" id="{78EBBB42-F34C-4996-83B3-2A946F32C3A2}"/>
+                <a16:creationId xmlns:a16="http://schemas.microsoft.com/office/drawing/2014/main" id="{CCB9E5A4-DB08-4064-8FE4-D17F905E3C0C}"/>
               </a:ext>
             </a:extLst>
           </p:cNvPr>
@@ -1292,7 +1292,7 @@
           <p:cNvPr id="6" name="citation">
             <a:extLst xmlns:a="http://schemas.openxmlformats.org/drawingml/2006/main">
               <a:ext uri="{FF2B5EF4-FFF2-40B4-BE49-F238E27FC236}">
-                <a16:creationId xmlns:a16="http://schemas.microsoft.com/office/drawing/2014/main" id="{50B8C388-6468-45A2-A504-F46CFCF9EF5D}"/>
+                <a16:creationId xmlns:a16="http://schemas.microsoft.com/office/drawing/2014/main" id="{E7237882-D872-461F-8CCD-17457B4B50BB}"/>
               </a:ext>
             </a:extLst>
           </p:cNvPr>
@@ -1342,7 +1342,7 @@
           <p:cNvPr id="7" name="logo-slot-institution-logo">
             <a:extLst xmlns:a="http://schemas.openxmlformats.org/drawingml/2006/main">
               <a:ext uri="{FF2B5EF4-FFF2-40B4-BE49-F238E27FC236}">
-                <a16:creationId xmlns:a16="http://schemas.microsoft.com/office/drawing/2014/main" id="{E58B11BD-2C7B-4CF2-8835-B9CEF5AC3F35}"/>
+                <a16:creationId xmlns:a16="http://schemas.microsoft.com/office/drawing/2014/main" id="{6DD918D1-4FE3-45C6-8165-6A838A654DF7}"/>
               </a:ext>
             </a:extLst>
           </p:cNvPr>
@@ -1377,7 +1377,7 @@
           <p:cNvPr id="8" name="logo-placeholder-institution-logo">
             <a:extLst xmlns:a="http://schemas.openxmlformats.org/drawingml/2006/main">
               <a:ext uri="{FF2B5EF4-FFF2-40B4-BE49-F238E27FC236}">
-                <a16:creationId xmlns:a16="http://schemas.microsoft.com/office/drawing/2014/main" id="{65239BD0-64E7-410B-865D-7265704F09C2}"/>
+                <a16:creationId xmlns:a16="http://schemas.microsoft.com/office/drawing/2014/main" id="{18C872C1-C826-4F3E-9F0E-D7B930091E7B}"/>
               </a:ext>
             </a:extLst>
           </p:cNvPr>
@@ -1427,7 +1427,7 @@
           <p:cNvPr id="9" name="header-summary">
             <a:extLst xmlns:a="http://schemas.openxmlformats.org/drawingml/2006/main">
               <a:ext uri="{FF2B5EF4-FFF2-40B4-BE49-F238E27FC236}">
-                <a16:creationId xmlns:a16="http://schemas.microsoft.com/office/drawing/2014/main" id="{695D43E2-A261-4070-A009-2804BBDFFB60}"/>
+                <a16:creationId xmlns:a16="http://schemas.microsoft.com/office/drawing/2014/main" id="{D0E428E3-9460-44EF-905D-0AA6321D8E11}"/>
               </a:ext>
             </a:extLst>
           </p:cNvPr>
@@ -1460,7 +1460,7 @@
           <p:cNvPr id="10" name="header-metric-1-value">
             <a:extLst xmlns:a="http://schemas.openxmlformats.org/drawingml/2006/main">
               <a:ext uri="{FF2B5EF4-FFF2-40B4-BE49-F238E27FC236}">
-                <a16:creationId xmlns:a16="http://schemas.microsoft.com/office/drawing/2014/main" id="{3E87073E-E4FC-436A-B431-22F43180AE15}"/>
+                <a16:creationId xmlns:a16="http://schemas.microsoft.com/office/drawing/2014/main" id="{9890E3C0-C61C-4019-A7EE-E7185F7EE376}"/>
               </a:ext>
             </a:extLst>
           </p:cNvPr>
@@ -1510,7 +1510,7 @@
           <p:cNvPr id="11" name="header-metric-1-label">
             <a:extLst xmlns:a="http://schemas.openxmlformats.org/drawingml/2006/main">
               <a:ext uri="{FF2B5EF4-FFF2-40B4-BE49-F238E27FC236}">
-                <a16:creationId xmlns:a16="http://schemas.microsoft.com/office/drawing/2014/main" id="{D836AB94-971C-4EE4-A33B-C4733F43FA21}"/>
+                <a16:creationId xmlns:a16="http://schemas.microsoft.com/office/drawing/2014/main" id="{865B2B61-62EA-41C4-9022-92170D2328C0}"/>
               </a:ext>
             </a:extLst>
           </p:cNvPr>
@@ -1560,7 +1560,7 @@
           <p:cNvPr id="12" name="header-metric-2-value">
             <a:extLst xmlns:a="http://schemas.openxmlformats.org/drawingml/2006/main">
               <a:ext uri="{FF2B5EF4-FFF2-40B4-BE49-F238E27FC236}">
-                <a16:creationId xmlns:a16="http://schemas.microsoft.com/office/drawing/2014/main" id="{9AFE5372-D871-4BFC-B0CF-B95BCA795D6C}"/>
+                <a16:creationId xmlns:a16="http://schemas.microsoft.com/office/drawing/2014/main" id="{358E818C-B8F2-4F39-9ACC-319BEC78A26E}"/>
               </a:ext>
             </a:extLst>
           </p:cNvPr>
@@ -1610,7 +1610,7 @@
           <p:cNvPr id="13" name="header-metric-2-label">
             <a:extLst xmlns:a="http://schemas.openxmlformats.org/drawingml/2006/main">
               <a:ext uri="{FF2B5EF4-FFF2-40B4-BE49-F238E27FC236}">
-                <a16:creationId xmlns:a16="http://schemas.microsoft.com/office/drawing/2014/main" id="{5F9FF2CE-A433-4F12-963C-CF7A21981629}"/>
+                <a16:creationId xmlns:a16="http://schemas.microsoft.com/office/drawing/2014/main" id="{E4AEDA92-B212-4EC5-829D-91BE1CFE30C1}"/>
               </a:ext>
             </a:extLst>
           </p:cNvPr>
@@ -1660,7 +1660,7 @@
           <p:cNvPr id="14" name="header-metric-3-value">
             <a:extLst xmlns:a="http://schemas.openxmlformats.org/drawingml/2006/main">
               <a:ext uri="{FF2B5EF4-FFF2-40B4-BE49-F238E27FC236}">
-                <a16:creationId xmlns:a16="http://schemas.microsoft.com/office/drawing/2014/main" id="{FB18B0EC-7C09-4531-8663-DB8E51BDADFB}"/>
+                <a16:creationId xmlns:a16="http://schemas.microsoft.com/office/drawing/2014/main" id="{70DAAC2C-ABA9-47F5-8A21-2DBB6F881462}"/>
               </a:ext>
             </a:extLst>
           </p:cNvPr>
@@ -1710,7 +1710,7 @@
           <p:cNvPr id="15" name="header-metric-3-label">
             <a:extLst xmlns:a="http://schemas.openxmlformats.org/drawingml/2006/main">
               <a:ext uri="{FF2B5EF4-FFF2-40B4-BE49-F238E27FC236}">
-                <a16:creationId xmlns:a16="http://schemas.microsoft.com/office/drawing/2014/main" id="{B04CEDA8-6F1D-462E-BF84-99111F9CB8B1}"/>
+                <a16:creationId xmlns:a16="http://schemas.microsoft.com/office/drawing/2014/main" id="{84DC702C-AF9A-49ED-8B7B-D25D59E25F3F}"/>
               </a:ext>
             </a:extLst>
           </p:cNvPr>
@@ -1760,7 +1760,7 @@
           <p:cNvPr id="16" name="question-title">
             <a:extLst xmlns:a="http://schemas.openxmlformats.org/drawingml/2006/main">
               <a:ext uri="{FF2B5EF4-FFF2-40B4-BE49-F238E27FC236}">
-                <a16:creationId xmlns:a16="http://schemas.microsoft.com/office/drawing/2014/main" id="{135B3D7F-57DC-4AC3-8911-AB3E49BAFEA2}"/>
+                <a16:creationId xmlns:a16="http://schemas.microsoft.com/office/drawing/2014/main" id="{B1B01912-40DB-464F-B98D-BB9614FFB809}"/>
               </a:ext>
             </a:extLst>
           </p:cNvPr>
@@ -1810,7 +1810,7 @@
           <p:cNvPr id="17" name="question-rule">
             <a:extLst xmlns:a="http://schemas.openxmlformats.org/drawingml/2006/main">
               <a:ext uri="{FF2B5EF4-FFF2-40B4-BE49-F238E27FC236}">
-                <a16:creationId xmlns:a16="http://schemas.microsoft.com/office/drawing/2014/main" id="{B090AB90-0B4C-4FEF-87FD-9D4A5131FA05}"/>
+                <a16:creationId xmlns:a16="http://schemas.microsoft.com/office/drawing/2014/main" id="{A0D7F093-3BBA-4652-81FD-BA22ABB19D08}"/>
               </a:ext>
             </a:extLst>
           </p:cNvPr>
@@ -1843,7 +1843,7 @@
           <p:cNvPr id="18" name="research-question">
             <a:extLst xmlns:a="http://schemas.openxmlformats.org/drawingml/2006/main">
               <a:ext uri="{FF2B5EF4-FFF2-40B4-BE49-F238E27FC236}">
-                <a16:creationId xmlns:a16="http://schemas.microsoft.com/office/drawing/2014/main" id="{0D812259-8C10-4541-BAE7-6A565F5DAD9E}"/>
+                <a16:creationId xmlns:a16="http://schemas.microsoft.com/office/drawing/2014/main" id="{BA91390C-A263-4DC3-A9E3-8780021CE7FA}"/>
               </a:ext>
             </a:extLst>
           </p:cNvPr>
@@ -1893,7 +1893,7 @@
           <p:cNvPr id="19" name="question-evidence">
             <a:extLst xmlns:a="http://schemas.openxmlformats.org/drawingml/2006/main">
               <a:ext uri="{FF2B5EF4-FFF2-40B4-BE49-F238E27FC236}">
-                <a16:creationId xmlns:a16="http://schemas.microsoft.com/office/drawing/2014/main" id="{3B231DEC-DACA-44DB-A328-51409650D711}"/>
+                <a16:creationId xmlns:a16="http://schemas.microsoft.com/office/drawing/2014/main" id="{DCE9A971-ED59-4546-8432-F03F3F70C10E}"/>
               </a:ext>
             </a:extLst>
           </p:cNvPr>
@@ -1943,7 +1943,7 @@
           <p:cNvPr id="20" name="pipeline-title">
             <a:extLst xmlns:a="http://schemas.openxmlformats.org/drawingml/2006/main">
               <a:ext uri="{FF2B5EF4-FFF2-40B4-BE49-F238E27FC236}">
-                <a16:creationId xmlns:a16="http://schemas.microsoft.com/office/drawing/2014/main" id="{EC5550B6-1414-47CC-9223-DC50061EA5ED}"/>
+                <a16:creationId xmlns:a16="http://schemas.microsoft.com/office/drawing/2014/main" id="{4491A785-309D-4550-A1E6-DE14ED804283}"/>
               </a:ext>
             </a:extLst>
           </p:cNvPr>
@@ -1993,7 +1993,7 @@
           <p:cNvPr id="21" name="pipeline-rule">
             <a:extLst xmlns:a="http://schemas.openxmlformats.org/drawingml/2006/main">
               <a:ext uri="{FF2B5EF4-FFF2-40B4-BE49-F238E27FC236}">
-                <a16:creationId xmlns:a16="http://schemas.microsoft.com/office/drawing/2014/main" id="{908E2B8A-6FDD-4F94-AA7A-D46DA8947FF1}"/>
+                <a16:creationId xmlns:a16="http://schemas.microsoft.com/office/drawing/2014/main" id="{C8385738-0C9C-4019-AF19-DA4F7E49D767}"/>
               </a:ext>
             </a:extLst>
           </p:cNvPr>
@@ -2026,7 +2026,7 @@
           <p:cNvPr id="22" name="pipeline-1-number-bg">
             <a:extLst xmlns:a="http://schemas.openxmlformats.org/drawingml/2006/main">
               <a:ext uri="{FF2B5EF4-FFF2-40B4-BE49-F238E27FC236}">
-                <a16:creationId xmlns:a16="http://schemas.microsoft.com/office/drawing/2014/main" id="{A7CB36C1-7E03-4207-92BA-922477444FB1}"/>
+                <a16:creationId xmlns:a16="http://schemas.microsoft.com/office/drawing/2014/main" id="{BF990D47-288E-4849-8FEE-A9DA8F82AC78}"/>
               </a:ext>
             </a:extLst>
           </p:cNvPr>
@@ -2059,7 +2059,7 @@
           <p:cNvPr id="23" name="pipeline-1-number">
             <a:extLst xmlns:a="http://schemas.openxmlformats.org/drawingml/2006/main">
               <a:ext uri="{FF2B5EF4-FFF2-40B4-BE49-F238E27FC236}">
-                <a16:creationId xmlns:a16="http://schemas.microsoft.com/office/drawing/2014/main" id="{D324A6F2-660A-4764-84E9-9DD38D5A7FD0}"/>
+                <a16:creationId xmlns:a16="http://schemas.microsoft.com/office/drawing/2014/main" id="{AA2497C8-2F2F-495C-BD00-B5AB5A5D0D6E}"/>
               </a:ext>
             </a:extLst>
           </p:cNvPr>
@@ -2109,7 +2109,7 @@
           <p:cNvPr id="24" name="pipeline-1-text">
             <a:extLst xmlns:a="http://schemas.openxmlformats.org/drawingml/2006/main">
               <a:ext uri="{FF2B5EF4-FFF2-40B4-BE49-F238E27FC236}">
-                <a16:creationId xmlns:a16="http://schemas.microsoft.com/office/drawing/2014/main" id="{96B65DB7-2235-4A43-8526-332C7C36E256}"/>
+                <a16:creationId xmlns:a16="http://schemas.microsoft.com/office/drawing/2014/main" id="{7FA4597A-1BDD-4485-BD90-FECA3D916CC4}"/>
               </a:ext>
             </a:extLst>
           </p:cNvPr>
@@ -2159,7 +2159,7 @@
           <p:cNvPr id="25" name="pipeline-2-number-bg">
             <a:extLst xmlns:a="http://schemas.openxmlformats.org/drawingml/2006/main">
               <a:ext uri="{FF2B5EF4-FFF2-40B4-BE49-F238E27FC236}">
-                <a16:creationId xmlns:a16="http://schemas.microsoft.com/office/drawing/2014/main" id="{41BC2DA4-70FF-4CB6-A87A-786DB9201886}"/>
+                <a16:creationId xmlns:a16="http://schemas.microsoft.com/office/drawing/2014/main" id="{94E1590E-92DF-482F-9A03-C2BB1726BB02}"/>
               </a:ext>
             </a:extLst>
           </p:cNvPr>
@@ -2192,7 +2192,7 @@
           <p:cNvPr id="26" name="pipeline-2-number">
             <a:extLst xmlns:a="http://schemas.openxmlformats.org/drawingml/2006/main">
               <a:ext uri="{FF2B5EF4-FFF2-40B4-BE49-F238E27FC236}">
-                <a16:creationId xmlns:a16="http://schemas.microsoft.com/office/drawing/2014/main" id="{4D263EBD-B55F-4487-9385-791343CD6A13}"/>
+                <a16:creationId xmlns:a16="http://schemas.microsoft.com/office/drawing/2014/main" id="{341345FC-2051-43F4-8F63-18200C0B70B9}"/>
               </a:ext>
             </a:extLst>
           </p:cNvPr>
@@ -2242,7 +2242,7 @@
           <p:cNvPr id="27" name="pipeline-2-text">
             <a:extLst xmlns:a="http://schemas.openxmlformats.org/drawingml/2006/main">
               <a:ext uri="{FF2B5EF4-FFF2-40B4-BE49-F238E27FC236}">
-                <a16:creationId xmlns:a16="http://schemas.microsoft.com/office/drawing/2014/main" id="{19B6EFE1-0B33-4966-9CE0-5AA17B7F93CF}"/>
+                <a16:creationId xmlns:a16="http://schemas.microsoft.com/office/drawing/2014/main" id="{88A8100D-7AEA-4967-9E3D-4527FAC6B21D}"/>
               </a:ext>
             </a:extLst>
           </p:cNvPr>
@@ -2292,7 +2292,7 @@
           <p:cNvPr id="28" name="pipeline-3-number-bg">
             <a:extLst xmlns:a="http://schemas.openxmlformats.org/drawingml/2006/main">
               <a:ext uri="{FF2B5EF4-FFF2-40B4-BE49-F238E27FC236}">
-                <a16:creationId xmlns:a16="http://schemas.microsoft.com/office/drawing/2014/main" id="{637E5C4A-AB75-4CE6-9FDD-6B82D1AF59F9}"/>
+                <a16:creationId xmlns:a16="http://schemas.microsoft.com/office/drawing/2014/main" id="{7B2BE355-EEEF-461F-A847-EC2B76E07B70}"/>
               </a:ext>
             </a:extLst>
           </p:cNvPr>
@@ -2325,7 +2325,7 @@
           <p:cNvPr id="29" name="pipeline-3-number">
             <a:extLst xmlns:a="http://schemas.openxmlformats.org/drawingml/2006/main">
               <a:ext uri="{FF2B5EF4-FFF2-40B4-BE49-F238E27FC236}">
-                <a16:creationId xmlns:a16="http://schemas.microsoft.com/office/drawing/2014/main" id="{5A7D27AC-854C-4882-B063-8FBDE2F058AA}"/>
+                <a16:creationId xmlns:a16="http://schemas.microsoft.com/office/drawing/2014/main" id="{034D3538-3CCA-4132-9A3C-AB807A1736D3}"/>
               </a:ext>
             </a:extLst>
           </p:cNvPr>
@@ -2375,7 +2375,7 @@
           <p:cNvPr id="30" name="pipeline-3-text">
             <a:extLst xmlns:a="http://schemas.openxmlformats.org/drawingml/2006/main">
               <a:ext uri="{FF2B5EF4-FFF2-40B4-BE49-F238E27FC236}">
-                <a16:creationId xmlns:a16="http://schemas.microsoft.com/office/drawing/2014/main" id="{4EBAF7BC-C837-401F-B691-9CF7E0B00603}"/>
+                <a16:creationId xmlns:a16="http://schemas.microsoft.com/office/drawing/2014/main" id="{2548914E-A39B-4C26-8D6B-2419000B0DF1}"/>
               </a:ext>
             </a:extLst>
           </p:cNvPr>
@@ -2425,7 +2425,7 @@
           <p:cNvPr id="31" name="pipeline-4-number-bg">
             <a:extLst xmlns:a="http://schemas.openxmlformats.org/drawingml/2006/main">
               <a:ext uri="{FF2B5EF4-FFF2-40B4-BE49-F238E27FC236}">
-                <a16:creationId xmlns:a16="http://schemas.microsoft.com/office/drawing/2014/main" id="{01CBACD2-8AE4-42D6-AB48-D41B18F6009A}"/>
+                <a16:creationId xmlns:a16="http://schemas.microsoft.com/office/drawing/2014/main" id="{A5BA5E0D-E991-4250-A028-9582230035C5}"/>
               </a:ext>
             </a:extLst>
           </p:cNvPr>
@@ -2458,7 +2458,7 @@
           <p:cNvPr id="32" name="pipeline-4-number">
             <a:extLst xmlns:a="http://schemas.openxmlformats.org/drawingml/2006/main">
               <a:ext uri="{FF2B5EF4-FFF2-40B4-BE49-F238E27FC236}">
-                <a16:creationId xmlns:a16="http://schemas.microsoft.com/office/drawing/2014/main" id="{A07B7C2D-DD59-4FEE-9C97-72EE4DED0E2E}"/>
+                <a16:creationId xmlns:a16="http://schemas.microsoft.com/office/drawing/2014/main" id="{34C0F48C-A98B-4DBA-8936-13B3661C57ED}"/>
               </a:ext>
             </a:extLst>
           </p:cNvPr>
@@ -2508,7 +2508,7 @@
           <p:cNvPr id="33" name="pipeline-4-text">
             <a:extLst xmlns:a="http://schemas.openxmlformats.org/drawingml/2006/main">
               <a:ext uri="{FF2B5EF4-FFF2-40B4-BE49-F238E27FC236}">
-                <a16:creationId xmlns:a16="http://schemas.microsoft.com/office/drawing/2014/main" id="{E4A6EEDE-84A3-45A1-AC7C-0F21D94B6B37}"/>
+                <a16:creationId xmlns:a16="http://schemas.microsoft.com/office/drawing/2014/main" id="{A9AB7657-29A4-4FCE-9DC6-8C7506EC9FE1}"/>
               </a:ext>
             </a:extLst>
           </p:cNvPr>
@@ -2558,7 +2558,7 @@
           <p:cNvPr id="34" name="dataset-panel">
             <a:extLst xmlns:a="http://schemas.openxmlformats.org/drawingml/2006/main">
               <a:ext uri="{FF2B5EF4-FFF2-40B4-BE49-F238E27FC236}">
-                <a16:creationId xmlns:a16="http://schemas.microsoft.com/office/drawing/2014/main" id="{A9D87746-A00C-4C7A-8C32-BC78EC5B23BD}"/>
+                <a16:creationId xmlns:a16="http://schemas.microsoft.com/office/drawing/2014/main" id="{E57E1D31-B40A-495B-AB3C-1E9C1AE15BC9}"/>
               </a:ext>
             </a:extLst>
           </p:cNvPr>
@@ -2593,7 +2593,7 @@
           <p:cNvPr id="35" name="dataset-kicker">
             <a:extLst xmlns:a="http://schemas.openxmlformats.org/drawingml/2006/main">
               <a:ext uri="{FF2B5EF4-FFF2-40B4-BE49-F238E27FC236}">
-                <a16:creationId xmlns:a16="http://schemas.microsoft.com/office/drawing/2014/main" id="{A5BB8DB8-14F9-4243-A093-BC94631C272E}"/>
+                <a16:creationId xmlns:a16="http://schemas.microsoft.com/office/drawing/2014/main" id="{4F06675D-C4B0-44D5-B1B8-82FB3B26D9AD}"/>
               </a:ext>
             </a:extLst>
           </p:cNvPr>
@@ -2643,7 +2643,7 @@
           <p:cNvPr id="36" name="datasets">
             <a:extLst xmlns:a="http://schemas.openxmlformats.org/drawingml/2006/main">
               <a:ext uri="{FF2B5EF4-FFF2-40B4-BE49-F238E27FC236}">
-                <a16:creationId xmlns:a16="http://schemas.microsoft.com/office/drawing/2014/main" id="{1E57A6B6-3C32-4932-A82D-733673BDD8E1}"/>
+                <a16:creationId xmlns:a16="http://schemas.microsoft.com/office/drawing/2014/main" id="{34135BC2-DCDB-4D0F-81DA-1B8B118222D7}"/>
               </a:ext>
             </a:extLst>
           </p:cNvPr>
@@ -2744,7 +2744,7 @@
           <p:cNvPr id="37" name="dataset-evidence">
             <a:extLst xmlns:a="http://schemas.openxmlformats.org/drawingml/2006/main">
               <a:ext uri="{FF2B5EF4-FFF2-40B4-BE49-F238E27FC236}">
-                <a16:creationId xmlns:a16="http://schemas.microsoft.com/office/drawing/2014/main" id="{61928C69-A8B4-47FE-83BE-A3DE922D95A6}"/>
+                <a16:creationId xmlns:a16="http://schemas.microsoft.com/office/drawing/2014/main" id="{3158D8D0-5857-4858-B0C0-74B36209F728}"/>
               </a:ext>
             </a:extLst>
           </p:cNvPr>
@@ -2794,7 +2794,7 @@
           <p:cNvPr id="38" name="figure-one-heading-title">
             <a:extLst xmlns:a="http://schemas.openxmlformats.org/drawingml/2006/main">
               <a:ext uri="{FF2B5EF4-FFF2-40B4-BE49-F238E27FC236}">
-                <a16:creationId xmlns:a16="http://schemas.microsoft.com/office/drawing/2014/main" id="{017CF475-48AE-4146-8DF5-80E8BCD3AF66}"/>
+                <a16:creationId xmlns:a16="http://schemas.microsoft.com/office/drawing/2014/main" id="{EF0347B3-2A9C-42AB-93A9-C44D8FF959E6}"/>
               </a:ext>
             </a:extLst>
           </p:cNvPr>
@@ -2844,7 +2844,7 @@
           <p:cNvPr id="39" name="figure-one-heading-rule">
             <a:extLst xmlns:a="http://schemas.openxmlformats.org/drawingml/2006/main">
               <a:ext uri="{FF2B5EF4-FFF2-40B4-BE49-F238E27FC236}">
-                <a16:creationId xmlns:a16="http://schemas.microsoft.com/office/drawing/2014/main" id="{FFCABF6C-9F87-462C-A601-5EA1791E526A}"/>
+                <a16:creationId xmlns:a16="http://schemas.microsoft.com/office/drawing/2014/main" id="{F3B5E008-694A-4BB7-A6EE-07EB833A82B2}"/>
               </a:ext>
             </a:extLst>
           </p:cNvPr>
@@ -2877,7 +2877,7 @@
           <p:cNvPr id="40" name="figure-one-frame">
             <a:extLst xmlns:a="http://schemas.openxmlformats.org/drawingml/2006/main">
               <a:ext uri="{FF2B5EF4-FFF2-40B4-BE49-F238E27FC236}">
-                <a16:creationId xmlns:a16="http://schemas.microsoft.com/office/drawing/2014/main" id="{59A36451-FB82-4971-B135-74E06E3CF587}"/>
+                <a16:creationId xmlns:a16="http://schemas.microsoft.com/office/drawing/2014/main" id="{A86229F8-DB1F-4208-BB35-4F588022C8C3}"/>
               </a:ext>
             </a:extLst>
           </p:cNvPr>
@@ -2912,7 +2912,7 @@
           <p:cNvPr id="41" name="figure-one-placeholder">
             <a:extLst xmlns:a="http://schemas.openxmlformats.org/drawingml/2006/main">
               <a:ext uri="{FF2B5EF4-FFF2-40B4-BE49-F238E27FC236}">
-                <a16:creationId xmlns:a16="http://schemas.microsoft.com/office/drawing/2014/main" id="{98547A86-0FF0-4915-BF1F-B128E7F6ACFB}"/>
+                <a16:creationId xmlns:a16="http://schemas.microsoft.com/office/drawing/2014/main" id="{F9089166-4834-480A-9BE9-4656C7C034F3}"/>
               </a:ext>
             </a:extLst>
           </p:cNvPr>
@@ -2947,7 +2947,7 @@
           <p:cNvPr id="42" name="figure-one-placeholder-label">
             <a:extLst xmlns:a="http://schemas.openxmlformats.org/drawingml/2006/main">
               <a:ext uri="{FF2B5EF4-FFF2-40B4-BE49-F238E27FC236}">
-                <a16:creationId xmlns:a16="http://schemas.microsoft.com/office/drawing/2014/main" id="{D7B14BD0-4C11-4397-A90D-3448BEBB489F}"/>
+                <a16:creationId xmlns:a16="http://schemas.microsoft.com/office/drawing/2014/main" id="{C3F42599-9273-4CB5-8C3C-39D305CD0AD8}"/>
               </a:ext>
             </a:extLst>
           </p:cNvPr>
@@ -2997,7 +2997,7 @@
           <p:cNvPr id="43" name="figure-one-caption">
             <a:extLst xmlns:a="http://schemas.openxmlformats.org/drawingml/2006/main">
               <a:ext uri="{FF2B5EF4-FFF2-40B4-BE49-F238E27FC236}">
-                <a16:creationId xmlns:a16="http://schemas.microsoft.com/office/drawing/2014/main" id="{457CDB46-9AFA-45BF-AA5D-1A04A62594A1}"/>
+                <a16:creationId xmlns:a16="http://schemas.microsoft.com/office/drawing/2014/main" id="{751BA952-EADD-48FE-B7DC-921058A62390}"/>
               </a:ext>
             </a:extLst>
           </p:cNvPr>
@@ -3047,7 +3047,7 @@
           <p:cNvPr id="44" name="figure-one-source">
             <a:extLst xmlns:a="http://schemas.openxmlformats.org/drawingml/2006/main">
               <a:ext uri="{FF2B5EF4-FFF2-40B4-BE49-F238E27FC236}">
-                <a16:creationId xmlns:a16="http://schemas.microsoft.com/office/drawing/2014/main" id="{0A96DA60-6106-4832-9DA7-3A61062D369A}"/>
+                <a16:creationId xmlns:a16="http://schemas.microsoft.com/office/drawing/2014/main" id="{F2D8F881-EFB5-4188-A173-548EFE9CC13A}"/>
               </a:ext>
             </a:extLst>
           </p:cNvPr>
@@ -3097,7 +3097,7 @@
           <p:cNvPr id="45" name="central-takeaway">
             <a:extLst xmlns:a="http://schemas.openxmlformats.org/drawingml/2006/main">
               <a:ext uri="{FF2B5EF4-FFF2-40B4-BE49-F238E27FC236}">
-                <a16:creationId xmlns:a16="http://schemas.microsoft.com/office/drawing/2014/main" id="{D6D6B5B4-735B-4F1F-965E-289722977357}"/>
+                <a16:creationId xmlns:a16="http://schemas.microsoft.com/office/drawing/2014/main" id="{F59C1009-AE45-4D69-81BE-D8E7AE7B0665}"/>
               </a:ext>
             </a:extLst>
           </p:cNvPr>
@@ -3130,7 +3130,7 @@
           <p:cNvPr id="46" name="central-takeaway-title">
             <a:extLst xmlns:a="http://schemas.openxmlformats.org/drawingml/2006/main">
               <a:ext uri="{FF2B5EF4-FFF2-40B4-BE49-F238E27FC236}">
-                <a16:creationId xmlns:a16="http://schemas.microsoft.com/office/drawing/2014/main" id="{C999008D-885B-4B54-9719-0716D2375C9C}"/>
+                <a16:creationId xmlns:a16="http://schemas.microsoft.com/office/drawing/2014/main" id="{084F917B-5324-423A-BE7C-346DD8C79373}"/>
               </a:ext>
             </a:extLst>
           </p:cNvPr>
@@ -3180,7 +3180,7 @@
           <p:cNvPr id="47" name="central-takeaway-subtitle">
             <a:extLst xmlns:a="http://schemas.openxmlformats.org/drawingml/2006/main">
               <a:ext uri="{FF2B5EF4-FFF2-40B4-BE49-F238E27FC236}">
-                <a16:creationId xmlns:a16="http://schemas.microsoft.com/office/drawing/2014/main" id="{177CD1B9-64DE-41BF-ABA2-068FB06314C9}"/>
+                <a16:creationId xmlns:a16="http://schemas.microsoft.com/office/drawing/2014/main" id="{D8F6E717-D52E-4CE7-A865-0EF86523A77F}"/>
               </a:ext>
             </a:extLst>
           </p:cNvPr>
@@ -3230,7 +3230,7 @@
           <p:cNvPr id="48" name="takeaway-evidence">
             <a:extLst xmlns:a="http://schemas.openxmlformats.org/drawingml/2006/main">
               <a:ext uri="{FF2B5EF4-FFF2-40B4-BE49-F238E27FC236}">
-                <a16:creationId xmlns:a16="http://schemas.microsoft.com/office/drawing/2014/main" id="{5B07DCA3-EFD7-4EAC-BCAF-379B9A818A63}"/>
+                <a16:creationId xmlns:a16="http://schemas.microsoft.com/office/drawing/2014/main" id="{A2546701-C737-44A4-A271-A2746C6067F4}"/>
               </a:ext>
             </a:extLst>
           </p:cNvPr>
@@ -3280,7 +3280,7 @@
           <p:cNvPr id="49" name="figure-two-heading-title">
             <a:extLst xmlns:a="http://schemas.openxmlformats.org/drawingml/2006/main">
               <a:ext uri="{FF2B5EF4-FFF2-40B4-BE49-F238E27FC236}">
-                <a16:creationId xmlns:a16="http://schemas.microsoft.com/office/drawing/2014/main" id="{5EA6D48C-99C8-47D2-A305-6AA3D72E27E5}"/>
+                <a16:creationId xmlns:a16="http://schemas.microsoft.com/office/drawing/2014/main" id="{717B6AD2-F59C-4179-AA36-015E80042C0D}"/>
               </a:ext>
             </a:extLst>
           </p:cNvPr>
@@ -3330,7 +3330,7 @@
           <p:cNvPr id="50" name="figure-two-heading-rule">
             <a:extLst xmlns:a="http://schemas.openxmlformats.org/drawingml/2006/main">
               <a:ext uri="{FF2B5EF4-FFF2-40B4-BE49-F238E27FC236}">
-                <a16:creationId xmlns:a16="http://schemas.microsoft.com/office/drawing/2014/main" id="{89AEC676-9BBF-48E3-BBEF-63D6F1AAE55A}"/>
+                <a16:creationId xmlns:a16="http://schemas.microsoft.com/office/drawing/2014/main" id="{4D1F716D-0AD1-4AAC-BCB7-A56C2334D0F1}"/>
               </a:ext>
             </a:extLst>
           </p:cNvPr>
@@ -3363,7 +3363,7 @@
           <p:cNvPr id="51" name="figure-two-frame">
             <a:extLst xmlns:a="http://schemas.openxmlformats.org/drawingml/2006/main">
               <a:ext uri="{FF2B5EF4-FFF2-40B4-BE49-F238E27FC236}">
-                <a16:creationId xmlns:a16="http://schemas.microsoft.com/office/drawing/2014/main" id="{A53D1326-F4CD-4EFC-AB8E-1FB9A184514D}"/>
+                <a16:creationId xmlns:a16="http://schemas.microsoft.com/office/drawing/2014/main" id="{09472AB2-7F6A-44C1-97C9-4FA93938AC51}"/>
               </a:ext>
             </a:extLst>
           </p:cNvPr>
@@ -3398,7 +3398,7 @@
           <p:cNvPr id="52" name="figure-two-placeholder">
             <a:extLst xmlns:a="http://schemas.openxmlformats.org/drawingml/2006/main">
               <a:ext uri="{FF2B5EF4-FFF2-40B4-BE49-F238E27FC236}">
-                <a16:creationId xmlns:a16="http://schemas.microsoft.com/office/drawing/2014/main" id="{58EF8560-0429-49A1-A745-1ADFF0A10A3F}"/>
+                <a16:creationId xmlns:a16="http://schemas.microsoft.com/office/drawing/2014/main" id="{2A90CD33-BAF3-4CA7-B1D2-C6314CF7F893}"/>
               </a:ext>
             </a:extLst>
           </p:cNvPr>
@@ -3433,7 +3433,7 @@
           <p:cNvPr id="53" name="figure-two-placeholder-label">
             <a:extLst xmlns:a="http://schemas.openxmlformats.org/drawingml/2006/main">
               <a:ext uri="{FF2B5EF4-FFF2-40B4-BE49-F238E27FC236}">
-                <a16:creationId xmlns:a16="http://schemas.microsoft.com/office/drawing/2014/main" id="{12EE0AB8-BC56-4557-9A6A-237C81F90FEA}"/>
+                <a16:creationId xmlns:a16="http://schemas.microsoft.com/office/drawing/2014/main" id="{465BA7A3-9894-462B-9E0A-F609F141D63B}"/>
               </a:ext>
             </a:extLst>
           </p:cNvPr>
@@ -3483,7 +3483,7 @@
           <p:cNvPr id="54" name="figure-two-caption">
             <a:extLst xmlns:a="http://schemas.openxmlformats.org/drawingml/2006/main">
               <a:ext uri="{FF2B5EF4-FFF2-40B4-BE49-F238E27FC236}">
-                <a16:creationId xmlns:a16="http://schemas.microsoft.com/office/drawing/2014/main" id="{F302D08C-5FAC-4901-8004-34E2506D8155}"/>
+                <a16:creationId xmlns:a16="http://schemas.microsoft.com/office/drawing/2014/main" id="{BBDAF7B7-2FDA-43EC-A490-DBCC6DE792E5}"/>
               </a:ext>
             </a:extLst>
           </p:cNvPr>
@@ -3533,7 +3533,7 @@
           <p:cNvPr id="55" name="figure-two-source">
             <a:extLst xmlns:a="http://schemas.openxmlformats.org/drawingml/2006/main">
               <a:ext uri="{FF2B5EF4-FFF2-40B4-BE49-F238E27FC236}">
-                <a16:creationId xmlns:a16="http://schemas.microsoft.com/office/drawing/2014/main" id="{EF613D8B-C987-4FF7-8B09-EADC254BD018}"/>
+                <a16:creationId xmlns:a16="http://schemas.microsoft.com/office/drawing/2014/main" id="{56583A78-79D4-493C-8A09-CDB767029A8F}"/>
               </a:ext>
             </a:extLst>
           </p:cNvPr>
@@ -3583,7 +3583,7 @@
           <p:cNvPr id="56" name="validation-heading-title">
             <a:extLst xmlns:a="http://schemas.openxmlformats.org/drawingml/2006/main">
               <a:ext uri="{FF2B5EF4-FFF2-40B4-BE49-F238E27FC236}">
-                <a16:creationId xmlns:a16="http://schemas.microsoft.com/office/drawing/2014/main" id="{9F0643EC-4304-4A4F-B43F-EF8DE53962E5}"/>
+                <a16:creationId xmlns:a16="http://schemas.microsoft.com/office/drawing/2014/main" id="{AC44521B-4543-476B-A898-B9411EAFBB2D}"/>
               </a:ext>
             </a:extLst>
           </p:cNvPr>
@@ -3633,7 +3633,7 @@
           <p:cNvPr id="57" name="validation-heading-rule">
             <a:extLst xmlns:a="http://schemas.openxmlformats.org/drawingml/2006/main">
               <a:ext uri="{FF2B5EF4-FFF2-40B4-BE49-F238E27FC236}">
-                <a16:creationId xmlns:a16="http://schemas.microsoft.com/office/drawing/2014/main" id="{17693C87-4CD9-468A-B057-49180C9A2463}"/>
+                <a16:creationId xmlns:a16="http://schemas.microsoft.com/office/drawing/2014/main" id="{314F9A0E-6479-484B-B3BC-6DB37A93E213}"/>
               </a:ext>
             </a:extLst>
           </p:cNvPr>
@@ -3666,7 +3666,7 @@
           <p:cNvPr id="58" name="validation-panel">
             <a:extLst xmlns:a="http://schemas.openxmlformats.org/drawingml/2006/main">
               <a:ext uri="{FF2B5EF4-FFF2-40B4-BE49-F238E27FC236}">
-                <a16:creationId xmlns:a16="http://schemas.microsoft.com/office/drawing/2014/main" id="{842E5057-15DE-4707-AD17-41E04DBF0028}"/>
+                <a16:creationId xmlns:a16="http://schemas.microsoft.com/office/drawing/2014/main" id="{E8FD92B7-B56E-4AE7-8751-BAF56204CF17}"/>
               </a:ext>
             </a:extLst>
           </p:cNvPr>
@@ -3701,7 +3701,7 @@
           <p:cNvPr id="59" name="validation">
             <a:extLst xmlns:a="http://schemas.openxmlformats.org/drawingml/2006/main">
               <a:ext uri="{FF2B5EF4-FFF2-40B4-BE49-F238E27FC236}">
-                <a16:creationId xmlns:a16="http://schemas.microsoft.com/office/drawing/2014/main" id="{4C506AF6-44B6-41A6-B86D-EDDDFCBB6654}"/>
+                <a16:creationId xmlns:a16="http://schemas.microsoft.com/office/drawing/2014/main" id="{31B692D0-5C48-4140-A64B-272139908B17}"/>
               </a:ext>
             </a:extLst>
           </p:cNvPr>
@@ -3802,7 +3802,7 @@
           <p:cNvPr id="60" name="validation-evidence">
             <a:extLst xmlns:a="http://schemas.openxmlformats.org/drawingml/2006/main">
               <a:ext uri="{FF2B5EF4-FFF2-40B4-BE49-F238E27FC236}">
-                <a16:creationId xmlns:a16="http://schemas.microsoft.com/office/drawing/2014/main" id="{6DE25810-46EC-449B-BB55-44175E0A955A}"/>
+                <a16:creationId xmlns:a16="http://schemas.microsoft.com/office/drawing/2014/main" id="{D243439A-5256-493C-AC8B-EDB804662D12}"/>
               </a:ext>
             </a:extLst>
           </p:cNvPr>
@@ -3852,7 +3852,7 @@
           <p:cNvPr id="61" name="performance-strip">
             <a:extLst xmlns:a="http://schemas.openxmlformats.org/drawingml/2006/main">
               <a:ext uri="{FF2B5EF4-FFF2-40B4-BE49-F238E27FC236}">
-                <a16:creationId xmlns:a16="http://schemas.microsoft.com/office/drawing/2014/main" id="{223707A6-8870-4CA0-9DED-D43DE3380AC9}"/>
+                <a16:creationId xmlns:a16="http://schemas.microsoft.com/office/drawing/2014/main" id="{1350A027-C5B8-4466-A981-9717FFD7E981}"/>
               </a:ext>
             </a:extLst>
           </p:cNvPr>
@@ -3885,7 +3885,7 @@
           <p:cNvPr id="62" name="performance-strip-text">
             <a:extLst xmlns:a="http://schemas.openxmlformats.org/drawingml/2006/main">
               <a:ext uri="{FF2B5EF4-FFF2-40B4-BE49-F238E27FC236}">
-                <a16:creationId xmlns:a16="http://schemas.microsoft.com/office/drawing/2014/main" id="{DFAADAD3-8A84-4EB6-9B36-37E3B67A464B}"/>
+                <a16:creationId xmlns:a16="http://schemas.microsoft.com/office/drawing/2014/main" id="{825567CC-5E84-4655-A28E-9A726F2A8651}"/>
               </a:ext>
             </a:extLst>
           </p:cNvPr>
@@ -3935,7 +3935,7 @@
           <p:cNvPr id="63" name="biology-heading-title">
             <a:extLst xmlns:a="http://schemas.openxmlformats.org/drawingml/2006/main">
               <a:ext uri="{FF2B5EF4-FFF2-40B4-BE49-F238E27FC236}">
-                <a16:creationId xmlns:a16="http://schemas.microsoft.com/office/drawing/2014/main" id="{429FA9E1-64F8-423D-A3CC-A9EB828021F7}"/>
+                <a16:creationId xmlns:a16="http://schemas.microsoft.com/office/drawing/2014/main" id="{46B0517E-3537-4BD3-AA47-321B1477E1BE}"/>
               </a:ext>
             </a:extLst>
           </p:cNvPr>
@@ -3985,7 +3985,7 @@
           <p:cNvPr id="64" name="biology-heading-rule">
             <a:extLst xmlns:a="http://schemas.openxmlformats.org/drawingml/2006/main">
               <a:ext uri="{FF2B5EF4-FFF2-40B4-BE49-F238E27FC236}">
-                <a16:creationId xmlns:a16="http://schemas.microsoft.com/office/drawing/2014/main" id="{F288CA67-F90B-4AED-A08A-03C1D7B14178}"/>
+                <a16:creationId xmlns:a16="http://schemas.microsoft.com/office/drawing/2014/main" id="{271102CC-CE8F-484D-96A8-7CD848BFF565}"/>
               </a:ext>
             </a:extLst>
           </p:cNvPr>
@@ -4018,7 +4018,7 @@
           <p:cNvPr id="65" name="biology-1-value">
             <a:extLst xmlns:a="http://schemas.openxmlformats.org/drawingml/2006/main">
               <a:ext uri="{FF2B5EF4-FFF2-40B4-BE49-F238E27FC236}">
-                <a16:creationId xmlns:a16="http://schemas.microsoft.com/office/drawing/2014/main" id="{96109C7D-076F-44BF-82BE-C7AADD29A16C}"/>
+                <a16:creationId xmlns:a16="http://schemas.microsoft.com/office/drawing/2014/main" id="{023C3F7B-A1A8-45B5-BBC6-0A49859D083D}"/>
               </a:ext>
             </a:extLst>
           </p:cNvPr>
@@ -4068,7 +4068,7 @@
           <p:cNvPr id="66" name="biology-1-label">
             <a:extLst xmlns:a="http://schemas.openxmlformats.org/drawingml/2006/main">
               <a:ext uri="{FF2B5EF4-FFF2-40B4-BE49-F238E27FC236}">
-                <a16:creationId xmlns:a16="http://schemas.microsoft.com/office/drawing/2014/main" id="{6B356703-6C09-43A1-B880-2BAAEDB5F09F}"/>
+                <a16:creationId xmlns:a16="http://schemas.microsoft.com/office/drawing/2014/main" id="{3B6F47E5-5CAB-4E8C-8783-886BCDEE0461}"/>
               </a:ext>
             </a:extLst>
           </p:cNvPr>
@@ -4118,7 +4118,7 @@
           <p:cNvPr id="67" name="biology-2-value">
             <a:extLst xmlns:a="http://schemas.openxmlformats.org/drawingml/2006/main">
               <a:ext uri="{FF2B5EF4-FFF2-40B4-BE49-F238E27FC236}">
-                <a16:creationId xmlns:a16="http://schemas.microsoft.com/office/drawing/2014/main" id="{FD1D1A00-1C0B-4F2A-8476-F35B046F933D}"/>
+                <a16:creationId xmlns:a16="http://schemas.microsoft.com/office/drawing/2014/main" id="{B43EFAC4-437C-41C3-A13A-90736C158C1B}"/>
               </a:ext>
             </a:extLst>
           </p:cNvPr>
@@ -4168,7 +4168,7 @@
           <p:cNvPr id="68" name="biology-2-label">
             <a:extLst xmlns:a="http://schemas.openxmlformats.org/drawingml/2006/main">
               <a:ext uri="{FF2B5EF4-FFF2-40B4-BE49-F238E27FC236}">
-                <a16:creationId xmlns:a16="http://schemas.microsoft.com/office/drawing/2014/main" id="{B4A84DE9-903D-4C6F-A414-D96F41C1B480}"/>
+                <a16:creationId xmlns:a16="http://schemas.microsoft.com/office/drawing/2014/main" id="{E53DEEA4-28FE-4645-8F74-35352E99316D}"/>
               </a:ext>
             </a:extLst>
           </p:cNvPr>
@@ -4218,7 +4218,7 @@
           <p:cNvPr id="69" name="biology-3-value">
             <a:extLst xmlns:a="http://schemas.openxmlformats.org/drawingml/2006/main">
               <a:ext uri="{FF2B5EF4-FFF2-40B4-BE49-F238E27FC236}">
-                <a16:creationId xmlns:a16="http://schemas.microsoft.com/office/drawing/2014/main" id="{1616ADD5-CF9E-46E2-B4FF-8DFAAE421EF3}"/>
+                <a16:creationId xmlns:a16="http://schemas.microsoft.com/office/drawing/2014/main" id="{D71FF842-8EC0-4FAA-8D4F-32B0DD553E39}"/>
               </a:ext>
             </a:extLst>
           </p:cNvPr>
@@ -4268,7 +4268,7 @@
           <p:cNvPr id="70" name="biology-3-label">
             <a:extLst xmlns:a="http://schemas.openxmlformats.org/drawingml/2006/main">
               <a:ext uri="{FF2B5EF4-FFF2-40B4-BE49-F238E27FC236}">
-                <a16:creationId xmlns:a16="http://schemas.microsoft.com/office/drawing/2014/main" id="{A6B30D89-1F12-455A-926F-6990317D1FE4}"/>
+                <a16:creationId xmlns:a16="http://schemas.microsoft.com/office/drawing/2014/main" id="{91D7C09C-965E-4A54-B4B6-094CFC8BC600}"/>
               </a:ext>
             </a:extLst>
           </p:cNvPr>
@@ -4318,7 +4318,7 @@
           <p:cNvPr id="71" name="biology-evidence">
             <a:extLst xmlns:a="http://schemas.openxmlformats.org/drawingml/2006/main">
               <a:ext uri="{FF2B5EF4-FFF2-40B4-BE49-F238E27FC236}">
-                <a16:creationId xmlns:a16="http://schemas.microsoft.com/office/drawing/2014/main" id="{BD639280-5C66-4544-8A07-F1E7D82EBC72}"/>
+                <a16:creationId xmlns:a16="http://schemas.microsoft.com/office/drawing/2014/main" id="{96966E9A-00B6-434F-A5CA-44B1D7B993C6}"/>
               </a:ext>
             </a:extLst>
           </p:cNvPr>
@@ -4368,7 +4368,7 @@
           <p:cNvPr id="72" name="figure-three-frame">
             <a:extLst xmlns:a="http://schemas.openxmlformats.org/drawingml/2006/main">
               <a:ext uri="{FF2B5EF4-FFF2-40B4-BE49-F238E27FC236}">
-                <a16:creationId xmlns:a16="http://schemas.microsoft.com/office/drawing/2014/main" id="{F431F94F-76D8-49FB-AF4D-E76559B47E7C}"/>
+                <a16:creationId xmlns:a16="http://schemas.microsoft.com/office/drawing/2014/main" id="{4DB8106E-4244-405D-A7B8-F26C13D93CA2}"/>
               </a:ext>
             </a:extLst>
           </p:cNvPr>
@@ -4403,7 +4403,7 @@
           <p:cNvPr id="73" name="figure-three-placeholder">
             <a:extLst xmlns:a="http://schemas.openxmlformats.org/drawingml/2006/main">
               <a:ext uri="{FF2B5EF4-FFF2-40B4-BE49-F238E27FC236}">
-                <a16:creationId xmlns:a16="http://schemas.microsoft.com/office/drawing/2014/main" id="{926C5650-8997-4FBE-A909-748B2EB24354}"/>
+                <a16:creationId xmlns:a16="http://schemas.microsoft.com/office/drawing/2014/main" id="{05A5DF2E-8EE0-4496-B7E5-829A067CFA4F}"/>
               </a:ext>
             </a:extLst>
           </p:cNvPr>
@@ -4438,7 +4438,7 @@
           <p:cNvPr id="74" name="figure-three-placeholder-label">
             <a:extLst xmlns:a="http://schemas.openxmlformats.org/drawingml/2006/main">
               <a:ext uri="{FF2B5EF4-FFF2-40B4-BE49-F238E27FC236}">
-                <a16:creationId xmlns:a16="http://schemas.microsoft.com/office/drawing/2014/main" id="{CC49A5C6-F946-4519-B904-A2E852C54C6C}"/>
+                <a16:creationId xmlns:a16="http://schemas.microsoft.com/office/drawing/2014/main" id="{CDE39118-86A1-40FB-A05A-C64B2332E8FC}"/>
               </a:ext>
             </a:extLst>
           </p:cNvPr>
@@ -4488,7 +4488,7 @@
           <p:cNvPr id="75" name="figure-three-caption">
             <a:extLst xmlns:a="http://schemas.openxmlformats.org/drawingml/2006/main">
               <a:ext uri="{FF2B5EF4-FFF2-40B4-BE49-F238E27FC236}">
-                <a16:creationId xmlns:a16="http://schemas.microsoft.com/office/drawing/2014/main" id="{D04A7E58-FA73-4A25-8466-4EB1C854DE7D}"/>
+                <a16:creationId xmlns:a16="http://schemas.microsoft.com/office/drawing/2014/main" id="{E3165AD2-5B91-4E72-9F91-4068299B164F}"/>
               </a:ext>
             </a:extLst>
           </p:cNvPr>
@@ -4538,7 +4538,7 @@
           <p:cNvPr id="76" name="figure-three-source">
             <a:extLst xmlns:a="http://schemas.openxmlformats.org/drawingml/2006/main">
               <a:ext uri="{FF2B5EF4-FFF2-40B4-BE49-F238E27FC236}">
-                <a16:creationId xmlns:a16="http://schemas.microsoft.com/office/drawing/2014/main" id="{789D8E5C-50F5-4679-9A02-93C592275E17}"/>
+                <a16:creationId xmlns:a16="http://schemas.microsoft.com/office/drawing/2014/main" id="{0B5DFCB7-7A06-4A10-BA2A-37BE2ACB941E}"/>
               </a:ext>
             </a:extLst>
           </p:cNvPr>
@@ -4588,7 +4588,7 @@
           <p:cNvPr id="77" name="validation-visual-heading-title">
             <a:extLst xmlns:a="http://schemas.openxmlformats.org/drawingml/2006/main">
               <a:ext uri="{FF2B5EF4-FFF2-40B4-BE49-F238E27FC236}">
-                <a16:creationId xmlns:a16="http://schemas.microsoft.com/office/drawing/2014/main" id="{671DE505-FF70-47E6-9CD2-88F3F018CEBA}"/>
+                <a16:creationId xmlns:a16="http://schemas.microsoft.com/office/drawing/2014/main" id="{54C293A7-3E9E-4070-98D1-39F015B79C2C}"/>
               </a:ext>
             </a:extLst>
           </p:cNvPr>
@@ -4638,7 +4638,7 @@
           <p:cNvPr id="78" name="validation-visual-heading-rule">
             <a:extLst xmlns:a="http://schemas.openxmlformats.org/drawingml/2006/main">
               <a:ext uri="{FF2B5EF4-FFF2-40B4-BE49-F238E27FC236}">
-                <a16:creationId xmlns:a16="http://schemas.microsoft.com/office/drawing/2014/main" id="{07CA9436-EDF8-4414-A64A-8D975ABEDC99}"/>
+                <a16:creationId xmlns:a16="http://schemas.microsoft.com/office/drawing/2014/main" id="{3932B15B-63FA-469B-AC7D-1121047320CB}"/>
               </a:ext>
             </a:extLst>
           </p:cNvPr>
@@ -4671,7 +4671,7 @@
           <p:cNvPr id="79" name="figure-four-frame">
             <a:extLst xmlns:a="http://schemas.openxmlformats.org/drawingml/2006/main">
               <a:ext uri="{FF2B5EF4-FFF2-40B4-BE49-F238E27FC236}">
-                <a16:creationId xmlns:a16="http://schemas.microsoft.com/office/drawing/2014/main" id="{8DF030C2-3EC1-4C4E-B515-A92F320EED38}"/>
+                <a16:creationId xmlns:a16="http://schemas.microsoft.com/office/drawing/2014/main" id="{5B10B87E-AFFF-443C-8B15-90CCB313438E}"/>
               </a:ext>
             </a:extLst>
           </p:cNvPr>
@@ -4706,7 +4706,7 @@
           <p:cNvPr id="80" name="figure-four-placeholder">
             <a:extLst xmlns:a="http://schemas.openxmlformats.org/drawingml/2006/main">
               <a:ext uri="{FF2B5EF4-FFF2-40B4-BE49-F238E27FC236}">
-                <a16:creationId xmlns:a16="http://schemas.microsoft.com/office/drawing/2014/main" id="{F5A44B23-A41E-47F6-BEF4-D4F3C5B81289}"/>
+                <a16:creationId xmlns:a16="http://schemas.microsoft.com/office/drawing/2014/main" id="{5582A00B-0B84-4849-A6B7-09DCAD2A1925}"/>
               </a:ext>
             </a:extLst>
           </p:cNvPr>
@@ -4741,7 +4741,7 @@
           <p:cNvPr id="81" name="figure-four-placeholder-label">
             <a:extLst xmlns:a="http://schemas.openxmlformats.org/drawingml/2006/main">
               <a:ext uri="{FF2B5EF4-FFF2-40B4-BE49-F238E27FC236}">
-                <a16:creationId xmlns:a16="http://schemas.microsoft.com/office/drawing/2014/main" id="{7984BB9F-FFE9-4ABF-B04A-A11071D8C298}"/>
+                <a16:creationId xmlns:a16="http://schemas.microsoft.com/office/drawing/2014/main" id="{31D35071-AD3D-406B-B361-AAED3AE88952}"/>
               </a:ext>
             </a:extLst>
           </p:cNvPr>
@@ -4791,7 +4791,7 @@
           <p:cNvPr id="82" name="figure-four-caption">
             <a:extLst xmlns:a="http://schemas.openxmlformats.org/drawingml/2006/main">
               <a:ext uri="{FF2B5EF4-FFF2-40B4-BE49-F238E27FC236}">
-                <a16:creationId xmlns:a16="http://schemas.microsoft.com/office/drawing/2014/main" id="{EBEB99C9-6CF7-4391-A312-F743855B4997}"/>
+                <a16:creationId xmlns:a16="http://schemas.microsoft.com/office/drawing/2014/main" id="{0EC04942-3336-4BBF-A2DA-484772E3CD03}"/>
               </a:ext>
             </a:extLst>
           </p:cNvPr>
@@ -4841,7 +4841,7 @@
           <p:cNvPr id="83" name="figure-four-source">
             <a:extLst xmlns:a="http://schemas.openxmlformats.org/drawingml/2006/main">
               <a:ext uri="{FF2B5EF4-FFF2-40B4-BE49-F238E27FC236}">
-                <a16:creationId xmlns:a16="http://schemas.microsoft.com/office/drawing/2014/main" id="{35085A35-E725-4B4E-93C8-942050EB4B13}"/>
+                <a16:creationId xmlns:a16="http://schemas.microsoft.com/office/drawing/2014/main" id="{CF34B9B8-04B2-47D3-8018-07FBB59B9B21}"/>
               </a:ext>
             </a:extLst>
           </p:cNvPr>
@@ -4891,7 +4891,7 @@
           <p:cNvPr id="84" name="conclusion-heading-title">
             <a:extLst xmlns:a="http://schemas.openxmlformats.org/drawingml/2006/main">
               <a:ext uri="{FF2B5EF4-FFF2-40B4-BE49-F238E27FC236}">
-                <a16:creationId xmlns:a16="http://schemas.microsoft.com/office/drawing/2014/main" id="{EC03AB3F-7FFC-48E7-A2A2-B0A62A7EEA3D}"/>
+                <a16:creationId xmlns:a16="http://schemas.microsoft.com/office/drawing/2014/main" id="{66C2540D-7AAC-4944-94B1-E20ED067340A}"/>
               </a:ext>
             </a:extLst>
           </p:cNvPr>
@@ -4941,7 +4941,7 @@
           <p:cNvPr id="85" name="conclusion-heading-rule">
             <a:extLst xmlns:a="http://schemas.openxmlformats.org/drawingml/2006/main">
               <a:ext uri="{FF2B5EF4-FFF2-40B4-BE49-F238E27FC236}">
-                <a16:creationId xmlns:a16="http://schemas.microsoft.com/office/drawing/2014/main" id="{415E5D0F-A3EA-4ADB-905A-076B74AAFC55}"/>
+                <a16:creationId xmlns:a16="http://schemas.microsoft.com/office/drawing/2014/main" id="{D6DE98E8-1F7B-468C-976B-124187AFD3A5}"/>
               </a:ext>
             </a:extLst>
           </p:cNvPr>
@@ -4974,7 +4974,7 @@
           <p:cNvPr id="86" name="conclusion-panel">
             <a:extLst xmlns:a="http://schemas.openxmlformats.org/drawingml/2006/main">
               <a:ext uri="{FF2B5EF4-FFF2-40B4-BE49-F238E27FC236}">
-                <a16:creationId xmlns:a16="http://schemas.microsoft.com/office/drawing/2014/main" id="{D750D394-D865-4024-B651-DA6BC5E7DC68}"/>
+                <a16:creationId xmlns:a16="http://schemas.microsoft.com/office/drawing/2014/main" id="{B608A95A-0451-4E5C-A58B-6A0BCA68F0F4}"/>
               </a:ext>
             </a:extLst>
           </p:cNvPr>
@@ -5009,7 +5009,7 @@
           <p:cNvPr id="87" name="conclusion">
             <a:extLst xmlns:a="http://schemas.openxmlformats.org/drawingml/2006/main">
               <a:ext uri="{FF2B5EF4-FFF2-40B4-BE49-F238E27FC236}">
-                <a16:creationId xmlns:a16="http://schemas.microsoft.com/office/drawing/2014/main" id="{FC290EF4-9A8D-4719-8920-96AD52C25F1F}"/>
+                <a16:creationId xmlns:a16="http://schemas.microsoft.com/office/drawing/2014/main" id="{6E0D664C-B539-473B-A6D7-12800E2C8EBD}"/>
               </a:ext>
             </a:extLst>
           </p:cNvPr>
@@ -5059,7 +5059,7 @@
           <p:cNvPr id="88" name="conclusion-evidence">
             <a:extLst xmlns:a="http://schemas.openxmlformats.org/drawingml/2006/main">
               <a:ext uri="{FF2B5EF4-FFF2-40B4-BE49-F238E27FC236}">
-                <a16:creationId xmlns:a16="http://schemas.microsoft.com/office/drawing/2014/main" id="{F221A575-318F-4649-85D9-E97ABDE6E265}"/>
+                <a16:creationId xmlns:a16="http://schemas.microsoft.com/office/drawing/2014/main" id="{FBE5C254-F0DB-471E-91FF-4161EA6C2552}"/>
               </a:ext>
             </a:extLst>
           </p:cNvPr>
@@ -5109,7 +5109,7 @@
           <p:cNvPr id="89" name="footer-band">
             <a:extLst xmlns:a="http://schemas.openxmlformats.org/drawingml/2006/main">
               <a:ext uri="{FF2B5EF4-FFF2-40B4-BE49-F238E27FC236}">
-                <a16:creationId xmlns:a16="http://schemas.microsoft.com/office/drawing/2014/main" id="{3E01503C-6CE6-4CC0-9AD1-118FDEFC9BEE}"/>
+                <a16:creationId xmlns:a16="http://schemas.microsoft.com/office/drawing/2014/main" id="{7813C82A-0A74-451D-90F9-04C38B60A5EC}"/>
               </a:ext>
             </a:extLst>
           </p:cNvPr>
@@ -5142,7 +5142,7 @@
           <p:cNvPr id="90" name="footer-source">
             <a:extLst xmlns:a="http://schemas.openxmlformats.org/drawingml/2006/main">
               <a:ext uri="{FF2B5EF4-FFF2-40B4-BE49-F238E27FC236}">
-                <a16:creationId xmlns:a16="http://schemas.microsoft.com/office/drawing/2014/main" id="{9B5E604C-984A-4235-864B-6D5CBAAB592D}"/>
+                <a16:creationId xmlns:a16="http://schemas.microsoft.com/office/drawing/2014/main" id="{772AF40B-EF65-45BC-83DA-FB397B77C6D5}"/>
               </a:ext>
             </a:extLst>
           </p:cNvPr>
@@ -5192,7 +5192,7 @@
           <p:cNvPr id="91" name="footer-status">
             <a:extLst xmlns:a="http://schemas.openxmlformats.org/drawingml/2006/main">
               <a:ext uri="{FF2B5EF4-FFF2-40B4-BE49-F238E27FC236}">
-                <a16:creationId xmlns:a16="http://schemas.microsoft.com/office/drawing/2014/main" id="{3F7CBBBE-E602-4062-A299-BB15A9B15782}"/>
+                <a16:creationId xmlns:a16="http://schemas.microsoft.com/office/drawing/2014/main" id="{D7A27266-2FA1-4855-8C3C-E5196F005AF0}"/>
               </a:ext>
             </a:extLst>
           </p:cNvPr>
@@ -5240,7 +5240,7 @@
     </p:spTree>
     <p:extLst>
       <p:ext uri="{BB962C8B-B14F-4D97-AF65-F5344CB8AC3E}">
-        <p14:creationId xmlns:p14="http://schemas.microsoft.com/office/powerpoint/2010/main" val="1640076245"/>
+        <p14:creationId xmlns:p14="http://schemas.microsoft.com/office/powerpoint/2010/main" val="611996667"/>
       </p:ext>
     </p:extLst>
   </p:cSld>
